--- a/docs/presentaciones/classes/clase-124-tf-data-api-presentacion.pptx
+++ b/docs/presentaciones/classes/clase-124-tf-data-api-presentacion.pptx
@@ -4910,7 +4910,235 @@
                 </a:solidFill>
                 <a:latin typeface="Courier New"/>
               </a:rPr>
-              <a:t># Imports y configuración inicial</a:t>
+              <a:t>import numpy as np</a:t>
+            </a:r>
+          </a:p>
+          <a:p>
+            <a:pPr>
+              <a:defRPr sz="1200" b="0">
+                <a:solidFill>
+                  <a:srgbClr val="F8FAFC"/>
+                </a:solidFill>
+                <a:latin typeface="Courier New"/>
+              </a:defRPr>
+            </a:pPr>
+            <a:r>
+              <a:rPr sz="1200" b="0">
+                <a:solidFill>
+                  <a:srgbClr val="F8FAFC"/>
+                </a:solidFill>
+                <a:latin typeface="Courier New"/>
+              </a:rPr>
+              <a:t>import tensorflow as tf</a:t>
+            </a:r>
+          </a:p>
+          <a:p>
+            <a:pPr>
+              <a:defRPr sz="1200" b="0">
+                <a:solidFill>
+                  <a:srgbClr val="F8FAFC"/>
+                </a:solidFill>
+                <a:latin typeface="Courier New"/>
+              </a:defRPr>
+            </a:pPr>
+            <a:r>
+              <a:rPr sz="1200" b="0">
+                <a:solidFill>
+                  <a:srgbClr val="F8FAFC"/>
+                </a:solidFill>
+                <a:latin typeface="Courier New"/>
+              </a:rPr>
+              <a:t>from tensorflow import keras</a:t>
+            </a:r>
+          </a:p>
+          <a:p>
+            <a:pPr>
+              <a:defRPr sz="1200" b="0">
+                <a:solidFill>
+                  <a:srgbClr val="F8FAFC"/>
+                </a:solidFill>
+                <a:latin typeface="Courier New"/>
+              </a:defRPr>
+            </a:pPr>
+            <a:r>
+              <a:rPr sz="1200" b="0">
+                <a:solidFill>
+                  <a:srgbClr val="F8FAFC"/>
+                </a:solidFill>
+                <a:latin typeface="Courier New"/>
+              </a:rPr>
+              <a:t>keras.utils.set_random_seed(42)</a:t>
+            </a:r>
+          </a:p>
+          <a:p>
+            <a:pPr>
+              <a:defRPr sz="1200" b="0">
+                <a:solidFill>
+                  <a:srgbClr val="F8FAFC"/>
+                </a:solidFill>
+                <a:latin typeface="Courier New"/>
+              </a:defRPr>
+            </a:pPr>
+            <a:r>
+              <a:rPr sz="1200" b="0">
+                <a:solidFill>
+                  <a:srgbClr val="F8FAFC"/>
+                </a:solidFill>
+                <a:latin typeface="Courier New"/>
+              </a:rPr>
+              <a:t>AUTOTUNE = tf.data.AUTOTUNE</a:t>
+            </a:r>
+          </a:p>
+          <a:p>
+            <a:pPr>
+              <a:defRPr sz="1200" b="0">
+                <a:solidFill>
+                  <a:srgbClr val="F8FAFC"/>
+                </a:solidFill>
+                <a:latin typeface="Courier New"/>
+              </a:defRPr>
+            </a:pPr>
+            <a:r>
+              <a:rPr sz="1200" b="0">
+                <a:solidFill>
+                  <a:srgbClr val="F8FAFC"/>
+                </a:solidFill>
+                <a:latin typeface="Courier New"/>
+              </a:rPr>
+              <a:t> </a:t>
+            </a:r>
+          </a:p>
+          <a:p>
+            <a:pPr>
+              <a:defRPr sz="1200" b="0">
+                <a:solidFill>
+                  <a:srgbClr val="F8FAFC"/>
+                </a:solidFill>
+                <a:latin typeface="Courier New"/>
+              </a:defRPr>
+            </a:pPr>
+            <a:r>
+              <a:rPr sz="1200" b="0">
+                <a:solidFill>
+                  <a:srgbClr val="F8FAFC"/>
+                </a:solidFill>
+                <a:latin typeface="Courier New"/>
+              </a:rPr>
+              <a:t>(X_tr, y_tr), _ = keras.datasets.fashion_mnist.load_data()</a:t>
+            </a:r>
+          </a:p>
+          <a:p>
+            <a:pPr>
+              <a:defRPr sz="1200" b="0">
+                <a:solidFill>
+                  <a:srgbClr val="F8FAFC"/>
+                </a:solidFill>
+                <a:latin typeface="Courier New"/>
+              </a:defRPr>
+            </a:pPr>
+            <a:r>
+              <a:rPr sz="1200" b="0">
+                <a:solidFill>
+                  <a:srgbClr val="F8FAFC"/>
+                </a:solidFill>
+                <a:latin typeface="Courier New"/>
+              </a:rPr>
+              <a:t>X_tr = X_tr.astype("float32")</a:t>
+            </a:r>
+          </a:p>
+          <a:p>
+            <a:pPr>
+              <a:defRPr sz="1200" b="0">
+                <a:solidFill>
+                  <a:srgbClr val="F8FAFC"/>
+                </a:solidFill>
+                <a:latin typeface="Courier New"/>
+              </a:defRPr>
+            </a:pPr>
+            <a:r>
+              <a:rPr sz="1200" b="0">
+                <a:solidFill>
+                  <a:srgbClr val="F8FAFC"/>
+                </a:solidFill>
+                <a:latin typeface="Courier New"/>
+              </a:rPr>
+              <a:t> </a:t>
+            </a:r>
+          </a:p>
+          <a:p>
+            <a:pPr>
+              <a:defRPr sz="1200" b="0">
+                <a:solidFill>
+                  <a:srgbClr val="F8FAFC"/>
+                </a:solidFill>
+                <a:latin typeface="Courier New"/>
+              </a:defRPr>
+            </a:pPr>
+            <a:r>
+              <a:rPr sz="1200" b="0">
+                <a:solidFill>
+                  <a:srgbClr val="F8FAFC"/>
+                </a:solidFill>
+                <a:latin typeface="Courier New"/>
+              </a:rPr>
+              <a:t>ds = tf.data.Dataset.from_tensor_slices((X_tr, y_tr))</a:t>
+            </a:r>
+          </a:p>
+          <a:p>
+            <a:pPr>
+              <a:defRPr sz="1200" b="0">
+                <a:solidFill>
+                  <a:srgbClr val="F8FAFC"/>
+                </a:solidFill>
+                <a:latin typeface="Courier New"/>
+              </a:defRPr>
+            </a:pPr>
+            <a:r>
+              <a:rPr sz="1200" b="0">
+                <a:solidFill>
+                  <a:srgbClr val="F8FAFC"/>
+                </a:solidFill>
+                <a:latin typeface="Courier New"/>
+              </a:rPr>
+              <a:t>print("element_spec:", ds.element_spec)</a:t>
+            </a:r>
+          </a:p>
+          <a:p>
+            <a:pPr>
+              <a:defRPr sz="1200" b="0">
+                <a:solidFill>
+                  <a:srgbClr val="F8FAFC"/>
+                </a:solidFill>
+                <a:latin typeface="Courier New"/>
+              </a:defRPr>
+            </a:pPr>
+            <a:r>
+              <a:rPr sz="1200" b="0">
+                <a:solidFill>
+                  <a:srgbClr val="F8FAFC"/>
+                </a:solidFill>
+                <a:latin typeface="Courier New"/>
+              </a:rPr>
+              <a:t>for imagen, etiqueta in ds.take(1):</a:t>
+            </a:r>
+          </a:p>
+          <a:p>
+            <a:pPr>
+              <a:defRPr sz="1200" b="0">
+                <a:solidFill>
+                  <a:srgbClr val="F8FAFC"/>
+                </a:solidFill>
+                <a:latin typeface="Courier New"/>
+              </a:defRPr>
+            </a:pPr>
+            <a:r>
+              <a:rPr sz="1200" b="0">
+                <a:solidFill>
+                  <a:srgbClr val="F8FAFC"/>
+                </a:solidFill>
+                <a:latin typeface="Courier New"/>
+              </a:rPr>
+              <a:t>    print("primera imagen:", imagen.shape, "| etiqueta:", int(etiqueta))</a:t>
             </a:r>
           </a:p>
         </p:txBody>

--- a/docs/presentaciones/classes/clase-124-tf-data-api-presentacion.pptx
+++ b/docs/presentaciones/classes/clase-124-tf-data-api-presentacion.pptx
@@ -3272,7 +3272,7 @@
                 </a:solidFill>
                 <a:latin typeface="Segoe UI"/>
               </a:rPr>
-              <a:t>Parte: 2 — Deep Learning · Fuente: Géron, cap. 13 § The Data API.  Duración estimada: 65 min.</a:t>
+              <a:t>Parte: 2 — Deep Learning · Fuente: Géron, cap. 13 § The Data API.  Duración estimada: 65 min. · Nivel: Avanzado</a:t>
             </a:r>
           </a:p>
         </p:txBody>
@@ -3581,7 +3581,7 @@
                 </a:solidFill>
                 <a:latin typeface="Segoe UI"/>
               </a:rPr>
-              <a:t>Parte: 2 — Deep Learning · Fuente: Géron, cap. 13 § The Data API.  Duración estimada: 65 min.</a:t>
+              <a:t>Parte: 2 — Deep Learning · Fuente: Géron, cap. 13 § The Data API.  Duración estimada: 65 min. · Nivel: Avanzado</a:t>
             </a:r>
           </a:p>
         </p:txBody>
